--- a/DALE25-W40-EUSTAT.pptx
+++ b/DALE25-W40-EUSTAT.pptx
@@ -22,6 +22,8 @@
     <p:sldId id="268" r:id="rId16"/>
     <p:sldId id="288" r:id="rId17"/>
     <p:sldId id="289" r:id="rId18"/>
+    <p:sldId id="293" r:id="rId19"/>
+    <p:sldId id="399" r:id="rId20"/>
   </p:sldIdLst>
   <p:sldSz cx="12192000" cy="6858000"/>
   <p:notesSz cx="12192000" cy="6858000"/>
@@ -4133,6 +4135,367 @@
 </p:sld>
 </file>
 
+<file path=ppt/slides/slide18.xml><?xml version="1.0" encoding="utf-8"?>
+<p:sld xmlns:a="http://schemas.openxmlformats.org/drawingml/2006/main" xmlns:r="http://schemas.openxmlformats.org/officeDocument/2006/relationships" xmlns:p="http://schemas.openxmlformats.org/presentationml/2006/main">
+  <p:cSld>
+    <p:spTree>
+      <p:nvGrpSpPr>
+        <p:cNvPr id="1" name="">
+          <a:extLst>
+            <a:ext uri="{FF2B5EF4-FFF2-40B4-BE49-F238E27FC236}">
+              <a16:creationId xmlns:a16="http://schemas.microsoft.com/office/drawing/2014/main" id="{6C06AEF0-8814-713C-DAD2-31A227139739}"/>
+            </a:ext>
+          </a:extLst>
+        </p:cNvPr>
+        <p:cNvGrpSpPr/>
+        <p:nvPr/>
+      </p:nvGrpSpPr>
+      <p:grpSpPr>
+        <a:xfrm>
+          <a:off x="0" y="0"/>
+          <a:ext cx="0" cy="0"/>
+          <a:chOff x="0" y="0"/>
+          <a:chExt cx="0" cy="0"/>
+        </a:xfrm>
+      </p:grpSpPr>
+      <p:pic>
+        <p:nvPicPr>
+          <p:cNvPr id="8" name="object 3">
+            <a:extLst>
+              <a:ext uri="{FF2B5EF4-FFF2-40B4-BE49-F238E27FC236}">
+                <a16:creationId xmlns:a16="http://schemas.microsoft.com/office/drawing/2014/main" id="{662A238C-BD1D-78A9-1549-99D8CE5BA091}"/>
+              </a:ext>
+            </a:extLst>
+          </p:cNvPr>
+          <p:cNvPicPr/>
+          <p:nvPr/>
+        </p:nvPicPr>
+        <p:blipFill rotWithShape="1">
+          <a:blip r:embed="rId2" cstate="print"/>
+          <a:srcRect r="67971" b="47034"/>
+          <a:stretch/>
+        </p:blipFill>
+        <p:spPr>
+          <a:xfrm>
+            <a:off x="306226" y="228601"/>
+            <a:ext cx="912973" cy="597524"/>
+          </a:xfrm>
+          <a:prstGeom prst="rect">
+            <a:avLst/>
+          </a:prstGeom>
+        </p:spPr>
+      </p:pic>
+      <p:sp>
+        <p:nvSpPr>
+          <p:cNvPr id="9" name="Tekstfelt 8">
+            <a:extLst>
+              <a:ext uri="{FF2B5EF4-FFF2-40B4-BE49-F238E27FC236}">
+                <a16:creationId xmlns:a16="http://schemas.microsoft.com/office/drawing/2014/main" id="{9853C4D2-9D67-6CFE-BFD7-974B4496AF9E}"/>
+              </a:ext>
+            </a:extLst>
+          </p:cNvPr>
+          <p:cNvSpPr txBox="1"/>
+          <p:nvPr/>
+        </p:nvSpPr>
+        <p:spPr>
+          <a:xfrm>
+            <a:off x="1600200" y="342697"/>
+            <a:ext cx="7419916" cy="646331"/>
+          </a:xfrm>
+          <a:prstGeom prst="rect">
+            <a:avLst/>
+          </a:prstGeom>
+          <a:noFill/>
+        </p:spPr>
+        <p:txBody>
+          <a:bodyPr wrap="none" rtlCol="0">
+            <a:spAutoFit/>
+          </a:bodyPr>
+          <a:lstStyle/>
+          <a:p>
+            <a:r>
+              <a:rPr lang="da-DK"/>
+              <a:t>Find et data-sæt som kan beskrive fordelingen af unge mødre i tyske regioner</a:t>
+            </a:r>
+          </a:p>
+          <a:p>
+            <a:pPr marL="342900" indent="-342900">
+              <a:buFont typeface="+mj-lt"/>
+              <a:buAutoNum type="arabicPeriod"/>
+            </a:pPr>
+            <a:endParaRPr lang="da-DK"/>
+          </a:p>
+        </p:txBody>
+      </p:sp>
+      <p:pic>
+        <p:nvPicPr>
+          <p:cNvPr id="6" name="Billede 5" descr="Et billede, der indeholder tekst, skærmbillede, diagram, Kurve&#10;&#10;Automatisk genereret beskrivelse">
+            <a:extLst>
+              <a:ext uri="{FF2B5EF4-FFF2-40B4-BE49-F238E27FC236}">
+                <a16:creationId xmlns:a16="http://schemas.microsoft.com/office/drawing/2014/main" id="{CE301BC6-B9E1-05DF-48D6-BC5685ABA561}"/>
+              </a:ext>
+            </a:extLst>
+          </p:cNvPr>
+          <p:cNvPicPr>
+            <a:picLocks noChangeAspect="1"/>
+          </p:cNvPicPr>
+          <p:nvPr/>
+        </p:nvPicPr>
+        <p:blipFill>
+          <a:blip r:embed="rId3">
+            <a:extLst>
+              <a:ext uri="{28A0092B-C50C-407E-A947-70E740481C1C}">
+                <a14:useLocalDpi xmlns:a14="http://schemas.microsoft.com/office/drawing/2010/main" val="0"/>
+              </a:ext>
+            </a:extLst>
+          </a:blip>
+          <a:stretch>
+            <a:fillRect/>
+          </a:stretch>
+        </p:blipFill>
+        <p:spPr>
+          <a:xfrm>
+            <a:off x="3200400" y="1447800"/>
+            <a:ext cx="7721600" cy="4356100"/>
+          </a:xfrm>
+          <a:prstGeom prst="rect">
+            <a:avLst/>
+          </a:prstGeom>
+        </p:spPr>
+      </p:pic>
+    </p:spTree>
+    <p:extLst>
+      <p:ext uri="{BB962C8B-B14F-4D97-AF65-F5344CB8AC3E}">
+        <p14:creationId xmlns:p14="http://schemas.microsoft.com/office/powerpoint/2010/main" val="67986581"/>
+      </p:ext>
+    </p:extLst>
+  </p:cSld>
+  <p:clrMapOvr>
+    <a:masterClrMapping/>
+  </p:clrMapOvr>
+</p:sld>
+</file>
+
+<file path=ppt/slides/slide19.xml><?xml version="1.0" encoding="utf-8"?>
+<p:sld xmlns:a="http://schemas.openxmlformats.org/drawingml/2006/main" xmlns:r="http://schemas.openxmlformats.org/officeDocument/2006/relationships" xmlns:p="http://schemas.openxmlformats.org/presentationml/2006/main">
+  <p:cSld>
+    <p:spTree>
+      <p:nvGrpSpPr>
+        <p:cNvPr id="1" name=""/>
+        <p:cNvGrpSpPr/>
+        <p:nvPr/>
+      </p:nvGrpSpPr>
+      <p:grpSpPr>
+        <a:xfrm>
+          <a:off x="0" y="0"/>
+          <a:ext cx="0" cy="0"/>
+          <a:chOff x="0" y="0"/>
+          <a:chExt cx="0" cy="0"/>
+        </a:xfrm>
+      </p:grpSpPr>
+      <p:pic>
+        <p:nvPicPr>
+          <p:cNvPr id="3" name="Billede 2">
+            <a:extLst>
+              <a:ext uri="{FF2B5EF4-FFF2-40B4-BE49-F238E27FC236}">
+                <a16:creationId xmlns:a16="http://schemas.microsoft.com/office/drawing/2014/main" id="{6A493379-446E-F5ED-DE1E-FB7E764A5769}"/>
+              </a:ext>
+            </a:extLst>
+          </p:cNvPr>
+          <p:cNvPicPr>
+            <a:picLocks noChangeAspect="1"/>
+          </p:cNvPicPr>
+          <p:nvPr/>
+        </p:nvPicPr>
+        <p:blipFill>
+          <a:blip r:embed="rId2"/>
+          <a:stretch>
+            <a:fillRect/>
+          </a:stretch>
+        </p:blipFill>
+        <p:spPr>
+          <a:xfrm>
+            <a:off x="344245" y="1514926"/>
+            <a:ext cx="5574852" cy="5166693"/>
+          </a:xfrm>
+          <a:prstGeom prst="rect">
+            <a:avLst/>
+          </a:prstGeom>
+        </p:spPr>
+      </p:pic>
+      <p:sp>
+        <p:nvSpPr>
+          <p:cNvPr id="5" name="Tekstfelt 4">
+            <a:extLst>
+              <a:ext uri="{FF2B5EF4-FFF2-40B4-BE49-F238E27FC236}">
+                <a16:creationId xmlns:a16="http://schemas.microsoft.com/office/drawing/2014/main" id="{2971D279-8833-E84E-0532-978DBE9D97A2}"/>
+              </a:ext>
+            </a:extLst>
+          </p:cNvPr>
+          <p:cNvSpPr txBox="1"/>
+          <p:nvPr/>
+        </p:nvSpPr>
+        <p:spPr>
+          <a:xfrm>
+            <a:off x="6551525" y="904352"/>
+            <a:ext cx="3881319" cy="369332"/>
+          </a:xfrm>
+          <a:prstGeom prst="rect">
+            <a:avLst/>
+          </a:prstGeom>
+          <a:noFill/>
+        </p:spPr>
+        <p:txBody>
+          <a:bodyPr wrap="none" rtlCol="0">
+            <a:spAutoFit/>
+          </a:bodyPr>
+          <a:lstStyle/>
+          <a:p>
+            <a:r>
+              <a:rPr lang="da-DK"/>
+              <a:t>Genskab denne graf ud fra </a:t>
+            </a:r>
+            <a:r>
+              <a:rPr lang="da-DK" b="1"/>
+              <a:t>nrg_pc_202</a:t>
+            </a:r>
+            <a:r>
+              <a:rPr lang="da-DK"/>
+              <a:t> </a:t>
+            </a:r>
+          </a:p>
+        </p:txBody>
+      </p:sp>
+      <p:sp>
+        <p:nvSpPr>
+          <p:cNvPr id="6" name="Tekstfelt 5">
+            <a:extLst>
+              <a:ext uri="{FF2B5EF4-FFF2-40B4-BE49-F238E27FC236}">
+                <a16:creationId xmlns:a16="http://schemas.microsoft.com/office/drawing/2014/main" id="{2846FFD4-7772-678D-D4D9-95E49DF00D7A}"/>
+              </a:ext>
+            </a:extLst>
+          </p:cNvPr>
+          <p:cNvSpPr txBox="1"/>
+          <p:nvPr/>
+        </p:nvSpPr>
+        <p:spPr>
+          <a:xfrm>
+            <a:off x="6702251" y="1507253"/>
+            <a:ext cx="5265336" cy="2308324"/>
+          </a:xfrm>
+          <a:prstGeom prst="rect">
+            <a:avLst/>
+          </a:prstGeom>
+          <a:noFill/>
+        </p:spPr>
+        <p:txBody>
+          <a:bodyPr wrap="square" rtlCol="0">
+            <a:spAutoFit/>
+          </a:bodyPr>
+          <a:lstStyle/>
+          <a:p>
+            <a:pPr marL="342900" indent="-342900">
+              <a:buAutoNum type="arabicParenR"/>
+            </a:pPr>
+            <a:r>
+              <a:rPr lang="da-DK"/>
+              <a:t>Find data og meta-data via UI</a:t>
+            </a:r>
+          </a:p>
+          <a:p>
+            <a:pPr marL="342900" indent="-342900">
+              <a:buAutoNum type="arabicParenR"/>
+            </a:pPr>
+            <a:r>
+              <a:rPr lang="da-DK"/>
+              <a:t>Hent meta-data via </a:t>
+            </a:r>
+            <a:r>
+              <a:rPr lang="da-DK" b="1">
+                <a:solidFill>
+                  <a:srgbClr val="1F2328"/>
+                </a:solidFill>
+                <a:latin typeface="ui-monospace"/>
+              </a:rPr>
+              <a:t>get_eurostat_dsd</a:t>
+            </a:r>
+          </a:p>
+          <a:p>
+            <a:pPr marL="342900" indent="-342900">
+              <a:buAutoNum type="arabicParenR"/>
+            </a:pPr>
+            <a:r>
+              <a:rPr lang="da-DK"/>
+              <a:t>Undersøg filtreringsmulighederne på </a:t>
+            </a:r>
+            <a:r>
+              <a:rPr lang="da-DK">
+                <a:hlinkClick r:id="rId3"/>
+              </a:rPr>
+              <a:t>https://github.com/eurostat/restatapi</a:t>
+            </a:r>
+            <a:endParaRPr lang="da-DK"/>
+          </a:p>
+          <a:p>
+            <a:pPr marL="800100" lvl="1" indent="-342900">
+              <a:buAutoNum type="arabicParenR"/>
+            </a:pPr>
+            <a:r>
+              <a:rPr lang="da-DK"/>
+              <a:t>Hent data fra før 2017, enhed KWH og lande er Danmark og Ungarn</a:t>
+            </a:r>
+          </a:p>
+          <a:p>
+            <a:pPr marL="342900" indent="-342900">
+              <a:buAutoNum type="arabicParenR"/>
+            </a:pPr>
+            <a:r>
+              <a:rPr lang="da-DK"/>
+              <a:t>Hent alle data og filtrer i R så du får noget a la grafen til venstre</a:t>
+            </a:r>
+          </a:p>
+        </p:txBody>
+      </p:sp>
+      <p:pic>
+        <p:nvPicPr>
+          <p:cNvPr id="4" name="object 3">
+            <a:extLst>
+              <a:ext uri="{FF2B5EF4-FFF2-40B4-BE49-F238E27FC236}">
+                <a16:creationId xmlns:a16="http://schemas.microsoft.com/office/drawing/2014/main" id="{4AAD5BC5-E5A4-681F-F913-DABE082FB397}"/>
+              </a:ext>
+            </a:extLst>
+          </p:cNvPr>
+          <p:cNvPicPr/>
+          <p:nvPr/>
+        </p:nvPicPr>
+        <p:blipFill rotWithShape="1">
+          <a:blip r:embed="rId4" cstate="print"/>
+          <a:srcRect r="67971" b="47034"/>
+          <a:stretch/>
+        </p:blipFill>
+        <p:spPr>
+          <a:xfrm>
+            <a:off x="533400" y="306828"/>
+            <a:ext cx="912973" cy="597524"/>
+          </a:xfrm>
+          <a:prstGeom prst="rect">
+            <a:avLst/>
+          </a:prstGeom>
+        </p:spPr>
+      </p:pic>
+    </p:spTree>
+    <p:extLst>
+      <p:ext uri="{BB962C8B-B14F-4D97-AF65-F5344CB8AC3E}">
+        <p14:creationId xmlns:p14="http://schemas.microsoft.com/office/powerpoint/2010/main" val="2621028159"/>
+      </p:ext>
+    </p:extLst>
+  </p:cSld>
+  <p:clrMapOvr>
+    <a:masterClrMapping/>
+  </p:clrMapOvr>
+</p:sld>
+</file>
+
 <file path=ppt/slides/slide2.xml><?xml version="1.0" encoding="utf-8"?>
 <p:sld xmlns:a="http://schemas.openxmlformats.org/drawingml/2006/main" xmlns:r="http://schemas.openxmlformats.org/officeDocument/2006/relationships" xmlns:p="http://schemas.openxmlformats.org/presentationml/2006/main">
   <p:cSld>
@@ -4809,272 +5172,6 @@
           <a:chExt cx="0" cy="0"/>
         </a:xfrm>
       </p:grpSpPr>
-      <p:sp>
-        <p:nvSpPr>
-          <p:cNvPr id="5" name="Tekstfelt 4">
-            <a:extLst>
-              <a:ext uri="{FF2B5EF4-FFF2-40B4-BE49-F238E27FC236}">
-                <a16:creationId xmlns:a16="http://schemas.microsoft.com/office/drawing/2014/main" id="{0B122EA1-275F-779A-7D49-5A75FF9C4D08}"/>
-              </a:ext>
-            </a:extLst>
-          </p:cNvPr>
-          <p:cNvSpPr txBox="1"/>
-          <p:nvPr/>
-        </p:nvSpPr>
-        <p:spPr>
-          <a:xfrm>
-            <a:off x="4876800" y="142546"/>
-            <a:ext cx="5836534" cy="3416320"/>
-          </a:xfrm>
-          <a:prstGeom prst="rect">
-            <a:avLst/>
-          </a:prstGeom>
-          <a:noFill/>
-        </p:spPr>
-        <p:txBody>
-          <a:bodyPr wrap="none" rtlCol="0">
-            <a:spAutoFit/>
-          </a:bodyPr>
-          <a:lstStyle/>
-          <a:p>
-            <a:r>
-              <a:rPr lang="da-DK" sz="2000" b="1">
-                <a:solidFill>
-                  <a:schemeClr val="accent6"/>
-                </a:solidFill>
-              </a:rPr>
-              <a:t>THE FLOW</a:t>
-            </a:r>
-          </a:p>
-          <a:p>
-            <a:pPr marL="342900" indent="-342900">
-              <a:buFont typeface="+mj-lt"/>
-              <a:buAutoNum type="arabicPeriod"/>
-            </a:pPr>
-            <a:r>
-              <a:rPr lang="da-DK"/>
-              <a:t>Get all tables:</a:t>
-            </a:r>
-          </a:p>
-          <a:p>
-            <a:pPr marL="800100" lvl="1" indent="-342900">
-              <a:buFont typeface="+mj-lt"/>
-              <a:buAutoNum type="arabicPeriod"/>
-            </a:pPr>
-            <a:r>
-              <a:rPr lang="da-DK"/>
-              <a:t>dst_get_tables(</a:t>
-            </a:r>
-            <a:r>
-              <a:rPr lang="da-DK">
-                <a:effectLst/>
-              </a:rPr>
-              <a:t>lang</a:t>
-            </a:r>
-            <a:r>
-              <a:rPr lang="da-DK"/>
-              <a:t> </a:t>
-            </a:r>
-            <a:r>
-              <a:rPr lang="da-DK">
-                <a:effectLst/>
-              </a:rPr>
-              <a:t>=</a:t>
-            </a:r>
-            <a:r>
-              <a:rPr lang="da-DK"/>
-              <a:t> </a:t>
-            </a:r>
-            <a:r>
-              <a:rPr lang="da-DK">
-                <a:effectLst/>
-              </a:rPr>
-              <a:t>"da"</a:t>
-            </a:r>
-            <a:r>
-              <a:rPr lang="da-DK"/>
-              <a:t>)</a:t>
-            </a:r>
-          </a:p>
-          <a:p>
-            <a:pPr marL="800100" lvl="1" indent="-342900">
-              <a:buFont typeface="+mj-lt"/>
-              <a:buAutoNum type="arabicPeriod"/>
-            </a:pPr>
-            <a:r>
-              <a:rPr lang="da-DK"/>
-              <a:t>grep for what you are looking for (forv1 og fti)</a:t>
-            </a:r>
-          </a:p>
-          <a:p>
-            <a:pPr marL="342900" indent="-342900">
-              <a:buFont typeface="+mj-lt"/>
-              <a:buAutoNum type="arabicPeriod"/>
-            </a:pPr>
-            <a:r>
-              <a:rPr lang="da-DK"/>
-              <a:t>Find meta for the tables</a:t>
-            </a:r>
-          </a:p>
-          <a:p>
-            <a:pPr marL="800100" lvl="1" indent="-342900">
-              <a:buFont typeface="+mj-lt"/>
-              <a:buAutoNum type="arabicPeriod"/>
-            </a:pPr>
-            <a:r>
-              <a:rPr lang="da-DK" b="0" i="0">
-                <a:solidFill>
-                  <a:srgbClr val="1F2328"/>
-                </a:solidFill>
-                <a:effectLst/>
-                <a:latin typeface="-apple-system"/>
-              </a:rPr>
-              <a:t>dst_</a:t>
-            </a:r>
-            <a:r>
-              <a:rPr lang="da-DK" b="1" i="0">
-                <a:solidFill>
-                  <a:srgbClr val="1F2328"/>
-                </a:solidFill>
-                <a:effectLst/>
-                <a:latin typeface="-apple-system"/>
-              </a:rPr>
-              <a:t>meta</a:t>
-            </a:r>
-            <a:r>
-              <a:rPr lang="da-DK" b="0" i="0">
-                <a:solidFill>
-                  <a:srgbClr val="1F2328"/>
-                </a:solidFill>
-                <a:effectLst/>
-                <a:latin typeface="-apple-system"/>
-              </a:rPr>
-              <a:t>(forv1)</a:t>
-            </a:r>
-          </a:p>
-          <a:p>
-            <a:pPr marL="342900" indent="-342900">
-              <a:buFont typeface="+mj-lt"/>
-              <a:buAutoNum type="arabicPeriod"/>
-            </a:pPr>
-            <a:r>
-              <a:rPr lang="da-DK">
-                <a:solidFill>
-                  <a:srgbClr val="1F2328"/>
-                </a:solidFill>
-                <a:latin typeface="-apple-system"/>
-              </a:rPr>
-              <a:t>Set the filters you need</a:t>
-            </a:r>
-          </a:p>
-          <a:p>
-            <a:pPr marL="800100" lvl="1" indent="-342900">
-              <a:buFont typeface="+mj-lt"/>
-              <a:buAutoNum type="arabicPeriod"/>
-            </a:pPr>
-            <a:r>
-              <a:rPr lang="da-DK">
-                <a:solidFill>
-                  <a:srgbClr val="1F2328"/>
-                </a:solidFill>
-                <a:latin typeface="-apple-system"/>
-              </a:rPr>
-              <a:t>list_of_filters = list(</a:t>
-            </a:r>
-            <a:br>
-              <a:rPr lang="da-DK">
-                <a:solidFill>
-                  <a:srgbClr val="1F2328"/>
-                </a:solidFill>
-                <a:latin typeface="-apple-system"/>
-              </a:rPr>
-            </a:br>
-            <a:r>
-              <a:rPr lang="da-DK">
-                <a:solidFill>
-                  <a:srgbClr val="1F2328"/>
-                </a:solidFill>
-                <a:latin typeface="-apple-system"/>
-              </a:rPr>
-              <a:t>VARIABLE1 = ”value-xx”,</a:t>
-            </a:r>
-            <a:br>
-              <a:rPr lang="da-DK">
-                <a:solidFill>
-                  <a:srgbClr val="1F2328"/>
-                </a:solidFill>
-                <a:latin typeface="-apple-system"/>
-              </a:rPr>
-            </a:br>
-            <a:r>
-              <a:rPr lang="da-DK">
-                <a:solidFill>
-                  <a:srgbClr val="1F2328"/>
-                </a:solidFill>
-                <a:latin typeface="-apple-system"/>
-              </a:rPr>
-              <a:t>VARIABLE2 = ”value-yy”)</a:t>
-            </a:r>
-          </a:p>
-          <a:p>
-            <a:pPr marL="342900" indent="-342900">
-              <a:buFont typeface="+mj-lt"/>
-              <a:buAutoNum type="arabicPeriod"/>
-            </a:pPr>
-            <a:r>
-              <a:rPr lang="da-DK">
-                <a:solidFill>
-                  <a:srgbClr val="1F2328"/>
-                </a:solidFill>
-                <a:latin typeface="-apple-system"/>
-              </a:rPr>
-              <a:t>Get the data </a:t>
-            </a:r>
-          </a:p>
-          <a:p>
-            <a:pPr marL="800100" lvl="1" indent="-342900">
-              <a:buFont typeface="+mj-lt"/>
-              <a:buAutoNum type="arabicPeriod"/>
-            </a:pPr>
-            <a:r>
-              <a:rPr lang="da-DK" b="0" i="0">
-                <a:solidFill>
-                  <a:srgbClr val="1F2328"/>
-                </a:solidFill>
-                <a:effectLst/>
-                <a:latin typeface="-apple-system"/>
-              </a:rPr>
-              <a:t>dst_</a:t>
-            </a:r>
-            <a:r>
-              <a:rPr lang="da-DK" b="1" i="0">
-                <a:solidFill>
-                  <a:srgbClr val="1F2328"/>
-                </a:solidFill>
-                <a:effectLst/>
-                <a:latin typeface="-apple-system"/>
-              </a:rPr>
-              <a:t>get_data</a:t>
-            </a:r>
-            <a:r>
-              <a:rPr lang="da-DK" b="0" i="0">
-                <a:solidFill>
-                  <a:srgbClr val="1F2328"/>
-                </a:solidFill>
-                <a:effectLst/>
-                <a:latin typeface="-apple-system"/>
-              </a:rPr>
-              <a:t>(table = ”forv1”, query = list_of_filters)</a:t>
-            </a:r>
-            <a:endParaRPr lang="da-DK">
-              <a:solidFill>
-                <a:srgbClr val="1F2328"/>
-              </a:solidFill>
-              <a:latin typeface="-apple-system"/>
-            </a:endParaRPr>
-          </a:p>
-        </p:txBody>
-      </p:sp>
       <p:pic>
         <p:nvPicPr>
           <p:cNvPr id="8" name="Picture 2" descr="GitHub Logo and symbol, meaning, history, PNG, brand">
@@ -5172,7 +5269,7 @@
         </p:nvSpPr>
         <p:spPr>
           <a:xfrm>
-            <a:off x="828754" y="4147892"/>
+            <a:off x="659027" y="2222846"/>
             <a:ext cx="6098058" cy="2308324"/>
           </a:xfrm>
           <a:prstGeom prst="rect">
@@ -5331,7 +5428,7 @@
         </p:nvSpPr>
         <p:spPr>
           <a:xfrm>
-            <a:off x="855527" y="3753846"/>
+            <a:off x="685800" y="1828800"/>
             <a:ext cx="5134932" cy="369332"/>
           </a:xfrm>
           <a:prstGeom prst="rect">
@@ -5915,43 +6012,38 @@
           <a:p>
             <a:r>
               <a:rPr lang="da-DK">
-                <a:effectLst/>
                 <a:latin typeface="Helvetica" pitchFamily="2" charset="0"/>
               </a:rPr>
-              <a:t>yy &lt;- get_eurostat (id = "nama_gdp_c", filters = list(</a:t>
+              <a:t>yy &lt;- get_eurostat(id = "nrg_pc_202", filters = list(</a:t>
             </a:r>
           </a:p>
           <a:p>
             <a:r>
               <a:rPr lang="da-DK">
-                <a:effectLst/>
                 <a:latin typeface="Helvetica" pitchFamily="2" charset="0"/>
               </a:rPr>
-              <a:t>geo = c("EU28", "FI"),</a:t>
+              <a:t>  geo = c("EU28", "FI"),</a:t>
             </a:r>
           </a:p>
           <a:p>
             <a:r>
               <a:rPr lang="da-DK">
-                <a:effectLst/>
                 <a:latin typeface="Helvetica" pitchFamily="2" charset="0"/>
               </a:rPr>
-              <a:t>unit = "EUR_HAB",</a:t>
+              <a:t>  unit = "EUR_HAB",</a:t>
             </a:r>
           </a:p>
           <a:p>
             <a:r>
               <a:rPr lang="da-DK">
-                <a:effectLst/>
                 <a:latin typeface="Helvetica" pitchFamily="2" charset="0"/>
               </a:rPr>
-              <a:t>indic_na = "B1GM"</a:t>
+              <a:t>  indic_na = "B1GM"</a:t>
             </a:r>
           </a:p>
           <a:p>
             <a:r>
               <a:rPr lang="da-DK">
-                <a:effectLst/>
                 <a:latin typeface="Helvetica" pitchFamily="2" charset="0"/>
               </a:rPr>
               <a:t>))</a:t>
